--- a/Lesson_2/Semana 0.pptx
+++ b/Lesson_2/Semana 0.pptx
@@ -168,14 +168,6 @@
     </p:ext>
   </p:extLst>
 </p:presentation>
-</file>
-
-<file path=ppt/revisionInfo.xml><?xml version="1.0" encoding="utf-8"?>
-<p1510:revInfo xmlns:a="http://schemas.openxmlformats.org/drawingml/2006/main" xmlns:r="http://schemas.openxmlformats.org/officeDocument/2006/relationships" xmlns:p1510="http://schemas.microsoft.com/office/powerpoint/2015/10/main">
-  <p1510:revLst>
-    <p1510:client id="{01347BAF-43BE-4A2E-9E6D-2A57DE594E32}" v="38" dt="2025-08-22T16:10:57.352"/>
-  </p1510:revLst>
-</p1510:revInfo>
 </file>
 
 <file path=ppt/changesInfos/changesInfo1.xml><?xml version="1.0" encoding="utf-8"?>
@@ -488,6 +480,45 @@
             <pc:docMk/>
             <pc:sldMk cId="3147677666" sldId="288"/>
             <ac:spMk id="23554" creationId="{C6836BF9-4082-FBBA-0B10-29F64D4F32E0}"/>
+          </ac:spMkLst>
+        </pc:spChg>
+      </pc:sldChg>
+    </pc:docChg>
+  </pc:docChgLst>
+  <pc:docChgLst>
+    <pc:chgData name="JHEYSON FABIAN VILLAVISAN BUITRAGO" userId="e5ced5c2-d787-455d-b115-4f08a699b8c8" providerId="ADAL" clId="{D29F3602-5A42-550B-85C2-F2C884FDDEDE}"/>
+    <pc:docChg chg="modSld">
+      <pc:chgData name="JHEYSON FABIAN VILLAVISAN BUITRAGO" userId="e5ced5c2-d787-455d-b115-4f08a699b8c8" providerId="ADAL" clId="{D29F3602-5A42-550B-85C2-F2C884FDDEDE}" dt="2025-08-23T17:19:49.967" v="5" actId="20577"/>
+      <pc:docMkLst>
+        <pc:docMk/>
+      </pc:docMkLst>
+      <pc:sldChg chg="modSp mod">
+        <pc:chgData name="JHEYSON FABIAN VILLAVISAN BUITRAGO" userId="e5ced5c2-d787-455d-b115-4f08a699b8c8" providerId="ADAL" clId="{D29F3602-5A42-550B-85C2-F2C884FDDEDE}" dt="2025-08-23T17:18:19.522" v="1" actId="20577"/>
+        <pc:sldMkLst>
+          <pc:docMk/>
+          <pc:sldMk cId="1893589053" sldId="286"/>
+        </pc:sldMkLst>
+        <pc:spChg chg="mod">
+          <ac:chgData name="JHEYSON FABIAN VILLAVISAN BUITRAGO" userId="e5ced5c2-d787-455d-b115-4f08a699b8c8" providerId="ADAL" clId="{D29F3602-5A42-550B-85C2-F2C884FDDEDE}" dt="2025-08-23T17:18:19.522" v="1" actId="20577"/>
+          <ac:spMkLst>
+            <pc:docMk/>
+            <pc:sldMk cId="1893589053" sldId="286"/>
+            <ac:spMk id="5" creationId="{1A53D2E8-36CA-CBFF-FCF4-DC71B9D30D55}"/>
+          </ac:spMkLst>
+        </pc:spChg>
+      </pc:sldChg>
+      <pc:sldChg chg="modSp mod">
+        <pc:chgData name="JHEYSON FABIAN VILLAVISAN BUITRAGO" userId="e5ced5c2-d787-455d-b115-4f08a699b8c8" providerId="ADAL" clId="{D29F3602-5A42-550B-85C2-F2C884FDDEDE}" dt="2025-08-23T17:19:49.967" v="5" actId="20577"/>
+        <pc:sldMkLst>
+          <pc:docMk/>
+          <pc:sldMk cId="2195650862" sldId="287"/>
+        </pc:sldMkLst>
+        <pc:spChg chg="mod">
+          <ac:chgData name="JHEYSON FABIAN VILLAVISAN BUITRAGO" userId="e5ced5c2-d787-455d-b115-4f08a699b8c8" providerId="ADAL" clId="{D29F3602-5A42-550B-85C2-F2C884FDDEDE}" dt="2025-08-23T17:19:49.967" v="5" actId="20577"/>
+          <ac:spMkLst>
+            <pc:docMk/>
+            <pc:sldMk cId="2195650862" sldId="287"/>
+            <ac:spMk id="5" creationId="{1D0C511C-9BC7-C4CE-4D1B-D4D88D44C72E}"/>
           </ac:spMkLst>
         </pc:spChg>
       </pc:sldChg>
@@ -1012,7 +1043,7 @@
               <a:pPr>
                 <a:defRPr/>
               </a:pPr>
-              <a:t>22/08/2025</a:t>
+              <a:t>23/08/25</a:t>
             </a:fld>
             <a:endParaRPr lang="es-CO"/>
           </a:p>
@@ -1255,7 +1286,7 @@
               <a:pPr>
                 <a:defRPr/>
               </a:pPr>
-              <a:t>22/08/2025</a:t>
+              <a:t>23/08/25</a:t>
             </a:fld>
             <a:endParaRPr lang="es-CO"/>
           </a:p>
@@ -4720,7 +4751,7 @@
           <a:p>
             <a:fld id="{9CF7635E-2D71-42E7-9E6C-FBB85A15A85F}" type="datetimeFigureOut">
               <a:rPr lang="es-CO" smtClean="0"/>
-              <a:t>22/08/2025</a:t>
+              <a:t>23/08/25</a:t>
             </a:fld>
             <a:endParaRPr lang="es-CO"/>
           </a:p>
@@ -4986,7 +5017,7 @@
           <a:p>
             <a:fld id="{9CF7635E-2D71-42E7-9E6C-FBB85A15A85F}" type="datetimeFigureOut">
               <a:rPr lang="es-CO" smtClean="0"/>
-              <a:t>22/08/2025</a:t>
+              <a:t>23/08/25</a:t>
             </a:fld>
             <a:endParaRPr lang="es-CO"/>
           </a:p>
@@ -5202,7 +5233,7 @@
           <a:p>
             <a:fld id="{9CF7635E-2D71-42E7-9E6C-FBB85A15A85F}" type="datetimeFigureOut">
               <a:rPr lang="es-CO" smtClean="0"/>
-              <a:t>22/08/2025</a:t>
+              <a:t>23/08/25</a:t>
             </a:fld>
             <a:endParaRPr lang="es-CO"/>
           </a:p>
@@ -6831,7 +6862,7 @@
           <a:p>
             <a:fld id="{9CF7635E-2D71-42E7-9E6C-FBB85A15A85F}" type="datetimeFigureOut">
               <a:rPr lang="es-CO" smtClean="0"/>
-              <a:t>22/08/2025</a:t>
+              <a:t>23/08/25</a:t>
             </a:fld>
             <a:endParaRPr lang="es-CO"/>
           </a:p>
@@ -7278,7 +7309,7 @@
           <a:p>
             <a:fld id="{9CF7635E-2D71-42E7-9E6C-FBB85A15A85F}" type="datetimeFigureOut">
               <a:rPr lang="es-CO" smtClean="0"/>
-              <a:t>22/08/2025</a:t>
+              <a:t>23/08/25</a:t>
             </a:fld>
             <a:endParaRPr lang="es-CO"/>
           </a:p>
@@ -7552,7 +7583,7 @@
           <a:p>
             <a:fld id="{9CF7635E-2D71-42E7-9E6C-FBB85A15A85F}" type="datetimeFigureOut">
               <a:rPr lang="es-CO" smtClean="0"/>
-              <a:t>22/08/2025</a:t>
+              <a:t>23/08/25</a:t>
             </a:fld>
             <a:endParaRPr lang="es-CO"/>
           </a:p>
@@ -7973,7 +8004,7 @@
           <a:p>
             <a:fld id="{9CF7635E-2D71-42E7-9E6C-FBB85A15A85F}" type="datetimeFigureOut">
               <a:rPr lang="es-CO" smtClean="0"/>
-              <a:t>22/08/2025</a:t>
+              <a:t>23/08/25</a:t>
             </a:fld>
             <a:endParaRPr lang="es-CO"/>
           </a:p>
@@ -8121,7 +8152,7 @@
           <a:p>
             <a:fld id="{9CF7635E-2D71-42E7-9E6C-FBB85A15A85F}" type="datetimeFigureOut">
               <a:rPr lang="es-CO" smtClean="0"/>
-              <a:t>22/08/2025</a:t>
+              <a:t>23/08/25</a:t>
             </a:fld>
             <a:endParaRPr lang="es-CO"/>
           </a:p>
@@ -8240,7 +8271,7 @@
           <a:p>
             <a:fld id="{9CF7635E-2D71-42E7-9E6C-FBB85A15A85F}" type="datetimeFigureOut">
               <a:rPr lang="es-CO" smtClean="0"/>
-              <a:t>22/08/2025</a:t>
+              <a:t>23/08/25</a:t>
             </a:fld>
             <a:endParaRPr lang="es-CO"/>
           </a:p>
@@ -8559,7 +8590,7 @@
           <a:p>
             <a:fld id="{9CF7635E-2D71-42E7-9E6C-FBB85A15A85F}" type="datetimeFigureOut">
               <a:rPr lang="es-CO" smtClean="0"/>
-              <a:t>22/08/2025</a:t>
+              <a:t>23/08/25</a:t>
             </a:fld>
             <a:endParaRPr lang="es-CO"/>
           </a:p>
@@ -8854,7 +8885,7 @@
           <a:p>
             <a:fld id="{9CF7635E-2D71-42E7-9E6C-FBB85A15A85F}" type="datetimeFigureOut">
               <a:rPr lang="es-CO" smtClean="0"/>
-              <a:t>22/08/2025</a:t>
+              <a:t>23/08/25</a:t>
             </a:fld>
             <a:endParaRPr lang="es-CO"/>
           </a:p>
@@ -9103,7 +9134,7 @@
           <a:p>
             <a:fld id="{9CF7635E-2D71-42E7-9E6C-FBB85A15A85F}" type="datetimeFigureOut">
               <a:rPr lang="es-CO" smtClean="0"/>
-              <a:t>22/08/2025</a:t>
+              <a:t>23/08/25</a:t>
             </a:fld>
             <a:endParaRPr lang="es-CO"/>
           </a:p>
@@ -13316,8 +13347,8 @@
           </a:p>
         </p:txBody>
       </p:sp>
-      <mc:AlternateContent xmlns:mc="http://schemas.openxmlformats.org/markup-compatibility/2006" xmlns:a14="http://schemas.microsoft.com/office/drawing/2010/main">
-        <mc:Choice Requires="a14">
+      <mc:AlternateContent xmlns:mc="http://schemas.openxmlformats.org/markup-compatibility/2006">
+        <mc:Choice xmlns:a14="http://schemas.microsoft.com/office/drawing/2010/main" Requires="a14">
           <p:sp>
             <p:nvSpPr>
               <p:cNvPr id="5" name="CuadroTexto 4">
@@ -13348,15 +13379,7 @@
               <a:p>
                 <a:r>
                   <a:rPr lang="es-ES" dirty="0"/>
-                  <a:t>Crear una función de transferencia de primer orden y visualizar cómo responde el sistema a una entrada tipo escalón e </a:t>
-                </a:r>
-                <a:r>
-                  <a:rPr lang="es-ES" dirty="0" err="1"/>
-                  <a:t>inpulso</a:t>
-                </a:r>
-                <a:r>
-                  <a:rPr lang="es-ES" dirty="0"/>
-                  <a:t>. Este es un análisis básico pero fundamental en el estudio de sistemas dinámicos.</a:t>
+                  <a:t>Crear una función de transferencia de primer orden y visualizar cómo responde el sistema a una entrada tipo escalón e impulso. Este es un análisis básico pero fundamental en el estudio de sistemas dinámicos.</a:t>
                 </a:r>
               </a:p>
               <a:p>
@@ -13440,7 +13463,7 @@
             </p:txBody>
           </p:sp>
         </mc:Choice>
-        <mc:Fallback xmlns="">
+        <mc:Fallback>
           <p:sp>
             <p:nvSpPr>
               <p:cNvPr id="5" name="CuadroTexto 4">
@@ -13466,7 +13489,7 @@
               <a:blipFill>
                 <a:blip r:embed="rId4"/>
                 <a:stretch>
-                  <a:fillRect l="-696" t="-1773"/>
+                  <a:fillRect l="-643" t="-1460" b="-1460"/>
                 </a:stretch>
               </a:blipFill>
             </p:spPr>
@@ -13869,8 +13892,8 @@
           </a:p>
         </p:txBody>
       </p:sp>
-      <mc:AlternateContent xmlns:mc="http://schemas.openxmlformats.org/markup-compatibility/2006" xmlns:a14="http://schemas.microsoft.com/office/drawing/2010/main">
-        <mc:Choice Requires="a14">
+      <mc:AlternateContent xmlns:mc="http://schemas.openxmlformats.org/markup-compatibility/2006">
+        <mc:Choice xmlns:a14="http://schemas.microsoft.com/office/drawing/2010/main" Requires="a14">
           <p:sp>
             <p:nvSpPr>
               <p:cNvPr id="5" name="CuadroTexto 4">
@@ -13901,11 +13924,11 @@
               <a:p>
                 <a:r>
                   <a:rPr lang="es-ES" dirty="0"/>
-                  <a:t>Crear una función de transferencia de primer orden y visualizar cómo responde el sistema a una entrada tipo escalón e </a:t>
+                  <a:t>Crear una función de transferencia de primer orden y visualizar cómo responde el sistema a una entrada tipo escalón </a:t>
                 </a:r>
                 <a:r>
-                  <a:rPr lang="es-ES" dirty="0" err="1"/>
-                  <a:t>inpulso</a:t>
+                  <a:rPr lang="es-ES"/>
+                  <a:t>e impulso</a:t>
                 </a:r>
                 <a:r>
                   <a:rPr lang="es-ES" dirty="0"/>
@@ -14005,7 +14028,7 @@
             </p:txBody>
           </p:sp>
         </mc:Choice>
-        <mc:Fallback xmlns="">
+        <mc:Fallback>
           <p:sp>
             <p:nvSpPr>
               <p:cNvPr id="5" name="CuadroTexto 4">
@@ -14031,7 +14054,7 @@
               <a:blipFill>
                 <a:blip r:embed="rId4"/>
                 <a:stretch>
-                  <a:fillRect l="-696" t="-1773"/>
+                  <a:fillRect l="-643" t="-1460" b="-1460"/>
                 </a:stretch>
               </a:blipFill>
             </p:spPr>
@@ -14479,7 +14502,6 @@
             </a:r>
           </a:p>
           <a:p>
-            <a:pPr/>
             <a:endParaRPr lang="es-CO" dirty="0"/>
           </a:p>
         </p:txBody>
@@ -15359,6 +15381,15 @@
 </file>
 
 <file path=customXml/item1.xml><?xml version="1.0" encoding="utf-8"?>
+<?mso-contentType ?>
+<FormTemplates xmlns="http://schemas.microsoft.com/sharepoint/v3/contenttype/forms">
+  <Display>DocumentLibraryForm</Display>
+  <Edit>DocumentLibraryForm</Edit>
+  <New>DocumentLibraryForm</New>
+</FormTemplates>
+</file>
+
+<file path=customXml/item2.xml><?xml version="1.0" encoding="utf-8"?>
 <ct:contentTypeSchema xmlns:ct="http://schemas.microsoft.com/office/2006/metadata/contentType" xmlns:ma="http://schemas.microsoft.com/office/2006/metadata/properties/metaAttributes" ct:_="" ma:_="" ma:contentTypeName="Documento" ma:contentTypeID="0x0101007A62137D465CE64A8C883A4664514BF8" ma:contentTypeVersion="15" ma:contentTypeDescription="Crear nuevo documento." ma:contentTypeScope="" ma:versionID="a1bd1d59f691eb9bca6952b111268275">
   <xsd:schema xmlns:xsd="http://www.w3.org/2001/XMLSchema" xmlns:xs="http://www.w3.org/2001/XMLSchema" xmlns:p="http://schemas.microsoft.com/office/2006/metadata/properties" xmlns:ns3="669280c1-d17e-4d1d-bd7f-b4f14cc6bf1d" xmlns:ns4="bdc56f61-abc0-4f7e-bfec-a93ccd1ae886" targetNamespace="http://schemas.microsoft.com/office/2006/metadata/properties" ma:root="true" ma:fieldsID="d02990a02f19f0f9fc7b999b1809cae4" ns3:_="" ns4:_="">
     <xsd:import namespace="669280c1-d17e-4d1d-bd7f-b4f14cc6bf1d"/>
@@ -15593,15 +15624,6 @@
 </ct:contentTypeSchema>
 </file>
 
-<file path=customXml/item2.xml><?xml version="1.0" encoding="utf-8"?>
-<?mso-contentType ?>
-<FormTemplates xmlns="http://schemas.microsoft.com/sharepoint/v3/contenttype/forms">
-  <Display>DocumentLibraryForm</Display>
-  <Edit>DocumentLibraryForm</Edit>
-  <New>DocumentLibraryForm</New>
-</FormTemplates>
-</file>
-
 <file path=customXml/item3.xml><?xml version="1.0" encoding="utf-8"?>
 <p:properties xmlns:p="http://schemas.microsoft.com/office/2006/metadata/properties" xmlns:xsi="http://www.w3.org/2001/XMLSchema-instance" xmlns:pc="http://schemas.microsoft.com/office/infopath/2007/PartnerControls">
   <documentManagement>
@@ -15611,6 +15633,14 @@
 </file>
 
 <file path=customXml/itemProps1.xml><?xml version="1.0" encoding="utf-8"?>
+<ds:datastoreItem xmlns:ds="http://schemas.openxmlformats.org/officeDocument/2006/customXml" ds:itemID="{4E8623C8-32E1-48B0-9F0A-13F2E9582B7E}">
+  <ds:schemaRefs>
+    <ds:schemaRef ds:uri="http://schemas.microsoft.com/sharepoint/v3/contenttype/forms"/>
+  </ds:schemaRefs>
+</ds:datastoreItem>
+</file>
+
+<file path=customXml/itemProps2.xml><?xml version="1.0" encoding="utf-8"?>
 <ds:datastoreItem xmlns:ds="http://schemas.openxmlformats.org/officeDocument/2006/customXml" ds:itemID="{025820C3-FD82-4EFC-BF14-EAF1F9613F52}">
   <ds:schemaRefs>
     <ds:schemaRef ds:uri="http://schemas.microsoft.com/office/2006/metadata/contentType"/>
@@ -15629,27 +15659,19 @@
 </ds:datastoreItem>
 </file>
 
-<file path=customXml/itemProps2.xml><?xml version="1.0" encoding="utf-8"?>
-<ds:datastoreItem xmlns:ds="http://schemas.openxmlformats.org/officeDocument/2006/customXml" ds:itemID="{4E8623C8-32E1-48B0-9F0A-13F2E9582B7E}">
-  <ds:schemaRefs>
-    <ds:schemaRef ds:uri="http://schemas.microsoft.com/sharepoint/v3/contenttype/forms"/>
-  </ds:schemaRefs>
-</ds:datastoreItem>
-</file>
-
 <file path=customXml/itemProps3.xml><?xml version="1.0" encoding="utf-8"?>
 <ds:datastoreItem xmlns:ds="http://schemas.openxmlformats.org/officeDocument/2006/customXml" ds:itemID="{0825853C-1B27-4995-A583-4D39F900BB7F}">
   <ds:schemaRefs>
     <ds:schemaRef ds:uri="http://schemas.microsoft.com/office/2006/documentManagement/types"/>
+    <ds:schemaRef ds:uri="bdc56f61-abc0-4f7e-bfec-a93ccd1ae886"/>
+    <ds:schemaRef ds:uri="http://schemas.microsoft.com/office/infopath/2007/PartnerControls"/>
+    <ds:schemaRef ds:uri="669280c1-d17e-4d1d-bd7f-b4f14cc6bf1d"/>
+    <ds:schemaRef ds:uri="http://purl.org/dc/terms/"/>
     <ds:schemaRef ds:uri="http://purl.org/dc/dcmitype/"/>
+    <ds:schemaRef ds:uri="http://schemas.microsoft.com/office/2006/metadata/properties"/>
     <ds:schemaRef ds:uri="http://schemas.openxmlformats.org/package/2006/metadata/core-properties"/>
-    <ds:schemaRef ds:uri="669280c1-d17e-4d1d-bd7f-b4f14cc6bf1d"/>
+    <ds:schemaRef ds:uri="http://www.w3.org/XML/1998/namespace"/>
     <ds:schemaRef ds:uri="http://purl.org/dc/elements/1.1/"/>
-    <ds:schemaRef ds:uri="http://purl.org/dc/terms/"/>
-    <ds:schemaRef ds:uri="http://schemas.microsoft.com/office/infopath/2007/PartnerControls"/>
-    <ds:schemaRef ds:uri="bdc56f61-abc0-4f7e-bfec-a93ccd1ae886"/>
-    <ds:schemaRef ds:uri="http://schemas.microsoft.com/office/2006/metadata/properties"/>
-    <ds:schemaRef ds:uri="http://www.w3.org/XML/1998/namespace"/>
   </ds:schemaRefs>
 </ds:datastoreItem>
 </file>